--- a/decks/geog-tectonics/geog-tectonics_ch4_earthquakes.pptx
+++ b/decks/geog-tectonics/geog-tectonics_ch4_earthquakes.pptx
@@ -126,30 +126,30 @@
   <p:extLst>
     <p:ext uri="{521415D9-36F7-43E2-AB2F-B90AF26B5E84}">
       <p14:sectionLst xmlns:p14="http://schemas.microsoft.com/office/powerpoint/2010/main">
-        <p14:section name="Opening" id="{be990cc8-acec-9e25-ea6f-ecf386cf3037}">
+        <p14:section name="Opening" id="{d5811fe8-1980-af68-9933-d90351c5a7ed}">
           <p14:sldIdLst>
             <p14:sldId id="256"/>
           </p14:sldIdLst>
         </p14:section>
-        <p14:section name="Gate" id="{790e8bd3-653f-fec9-85f9-ae0fea16f67f}">
+        <p14:section name="Gate" id="{c9f2c05d-359d-c66d-800e-424ddd634f99}">
           <p14:sldIdLst>
             <p14:sldId id="257"/>
             <p14:sldId id="258"/>
           </p14:sldIdLst>
         </p14:section>
-        <p14:section name="Pre-teach" id="{adcf7580-8852-2521-5a8e-a95575bcc470}">
+        <p14:section name="Pre-teach" id="{d5719e41-92fe-b575-8ce2-68392e5f1b53}">
           <p14:sldIdLst>
             <p14:sldId id="259"/>
             <p14:sldId id="260"/>
           </p14:sldIdLst>
         </p14:section>
-        <p14:section name="Read-along" id="{e08842c3-dfba-3b44-8b40-14d32c1cef58}">
+        <p14:section name="Read-along" id="{0508b681-792c-ff5f-4ace-f743a4eabe44}">
           <p14:sldIdLst>
             <p14:sldId id="261"/>
             <p14:sldId id="262"/>
           </p14:sldIdLst>
         </p14:section>
-        <p14:section name="Teach" id="{2d64f431-60aa-04db-80f6-7ae6215f8489}">
+        <p14:section name="Teach" id="{aec688c0-7ffe-01a2-67db-5a2494153649}">
           <p14:sldIdLst>
             <p14:sldId id="263"/>
             <p14:sldId id="264"/>
@@ -158,7 +158,7 @@
             <p14:sldId id="267"/>
           </p14:sldIdLst>
         </p14:section>
-        <p14:section name="Routes" id="{f50935ef-5c72-3c1c-cdfa-2d5b746e6a0a}">
+        <p14:section name="Routes" id="{6c86ef10-8b99-910b-4f2f-99b3d099eeb0}">
           <p14:sldIdLst>
             <p14:sldId id="268"/>
             <p14:sldId id="269"/>
@@ -166,12 +166,12 @@
             <p14:sldId id="271"/>
           </p14:sldIdLst>
         </p14:section>
-        <p14:section name="Close" id="{eb12a632-9858-e788-b9f5-5d142f0189c9}">
+        <p14:section name="Close" id="{492d76dd-24db-2d52-56e6-4a993b29ce81}">
           <p14:sldIdLst>
             <p14:sldId id="272"/>
           </p14:sldIdLst>
         </p14:section>
-        <p14:section name="Answers" id="{37733a86-979c-6f56-fb06-9e1644f36816}">
+        <p14:section name="Answers" id="{caea86ff-d985-3a0b-9241-d057b02c0579}">
           <p14:sldIdLst>
             <p14:sldId id="273"/>
             <p14:sldId id="274"/>
@@ -1327,7 +1327,7 @@
               <a:rPr lang="en-US" dirty="0"/>
               <a:t>Exit ticket — individual, silent, on a slip or mini-whiteboard. Recall before help: no notes, no lanes, no hints. Collect before pupils leave.
 Question: During an earthquake, which place on the surface feels the strongest shaking?
-Answer: A   The epicentre, directly above the focus. Seismic waves weaken as they spread from the focus, so the nearest surface point, the epicentre directly above the focus, shakes most.
+Answer: B   The epicentre, directly above the focus. Seismic waves weaken as they spread from the focus, so the nearest surface point, the epicentre directly above the focus, shakes most.
 Source of this question: module 3 task ("Who feels it most?") from the manifest.
 Sort the slips: correct → ready to move on; incorrect → start next lesson in the pre-teach group, with the read-along and the Support lane. Same destination next time.</a:t>
             </a:r>
@@ -1600,9 +1600,9 @@
             <a:r>
               <a:rPr lang="en-US" dirty="0"/>
               <a:t>Do now — retrieval. Silent, no notes, no help: recall comes before any support. Give about four minutes.
-1. What is the focus of an earthquake?  →  A   The point deep underground where the earthquake starts
+1. What is the focus of an earthquake?  →  C   The point deep underground where the earthquake starts
 2. The point on the surface directly above the focus is called the ___.  →  epicentre
-3. What causes a tsunami?  →  A   An earthquake under the sea
+3. What causes a tsunami?  →  B   An earthquake under the sea
 Circulate: who gets 3/3 (Stretch route), 2/3 (Core), 0–1 (Support)? Use this to route pupils later in the lesson.</a:t>
             </a:r>
             <a:endParaRPr lang="en-US" dirty="0"/>
@@ -1692,7 +1692,7 @@
             <a:r>
               <a:rPr lang="en-US" dirty="0"/>
               <a:t>Answers — exit ticket: Exit ticket. Reveal the answer; pupils mark their own work in a different colour, then read the "why" together. Same destination for every lane, so one answer serves the whole class.
-Answer: A   The epicentre, directly above the focus
+Answer: B   The epicentre, directly above the focus
 Why: Seismic waves weaken as they spread from the focus, so the nearest surface point, the epicentre directly above the focus, shakes most.
 Ask a Support pupil to explain one step, and a Stretch pupil to share their extension.</a:t>
             </a:r>
@@ -1783,9 +1783,9 @@
             <a:r>
               <a:rPr lang="en-US" dirty="0"/>
               <a:t>Answers — pupils mark their own in a different colour, then hands up for 3/3, 2/3, 1/3.
-1. A   The point deep underground where the earthquake starts. The focus is the point below the surface where the rocks first move. The point above it on the surface is the epicentre.
+1. C   The point deep underground where the earthquake starts. The focus is the point below the surface where the rocks first move. The point above it on the surface is the epicentre.
 2. epicentre. The epicentre is on the surface, directly above the focus, and is where the shaking is strongest.
-3. A   An earthquake under the sea. An undersea earthquake moves the sea floor suddenly, pushing the water above it into a huge wave that travels to the coast.
+3. B   An earthquake under the sea. An undersea earthquake moves the sea floor suddenly, pushing the water above it into a huge wave that travels to the coast.
 Say the route each score points to: 3/3 Stretch, 2/3 Core, 0–1 Support. Pupils may choose to move up.</a:t>
             </a:r>
             <a:endParaRPr lang="en-US" dirty="0"/>
@@ -10436,7 +10436,7 @@
                 <a:ea typeface="Calibri" pitchFamily="34" charset="-122"/>
                 <a:cs typeface="Calibri" pitchFamily="34" charset="-120"/>
               </a:rPr>
-              <a:t>The epicentre, directly above the focus</a:t>
+              <a:t>The place furthest away from the focus</a:t>
             </a:r>
             <a:endParaRPr lang="en-US" sz="2400" dirty="0"/>
           </a:p>
@@ -10473,7 +10473,7 @@
                 <a:ea typeface="Calibri" pitchFamily="34" charset="-122"/>
                 <a:cs typeface="Calibri" pitchFamily="34" charset="-120"/>
               </a:rPr>
-              <a:t>The place furthest away from the focus</a:t>
+              <a:t>The epicentre, directly above the focus</a:t>
             </a:r>
             <a:endParaRPr lang="en-US" sz="2400" dirty="0"/>
           </a:p>
@@ -10510,7 +10510,7 @@
                 <a:ea typeface="Calibri" pitchFamily="34" charset="-122"/>
                 <a:cs typeface="Calibri" pitchFamily="34" charset="-120"/>
               </a:rPr>
-              <a:t>The focus itself, because that is where people live</a:t>
+              <a:t>The coast, because that is where the tsunami arrives</a:t>
             </a:r>
             <a:endParaRPr lang="en-US" sz="2400" dirty="0"/>
           </a:p>
@@ -10547,7 +10547,7 @@
                 <a:ea typeface="Calibri" pitchFamily="34" charset="-122"/>
                 <a:cs typeface="Calibri" pitchFamily="34" charset="-120"/>
               </a:rPr>
-              <a:t>The coast, because that is where the tsunami arrives</a:t>
+              <a:t>The focus itself, because that is where people live</a:t>
             </a:r>
             <a:endParaRPr lang="en-US" sz="2400" dirty="0"/>
           </a:p>
@@ -12241,7 +12241,7 @@
                 <a:ea typeface="Calibri" pitchFamily="34" charset="-122"/>
                 <a:cs typeface="Calibri" pitchFamily="34" charset="-120"/>
               </a:rPr>
-              <a:t>The point deep underground where the earthquake starts</a:t>
+              <a:t>A smaller earthquake after the main one</a:t>
             </a:r>
             <a:endParaRPr lang="en-US" sz="1800" dirty="0"/>
           </a:p>
@@ -12278,7 +12278,7 @@
                 <a:ea typeface="Calibri" pitchFamily="34" charset="-122"/>
                 <a:cs typeface="Calibri" pitchFamily="34" charset="-120"/>
               </a:rPr>
-              <a:t>The point on the surface directly above where it starts</a:t>
+              <a:t>The instrument that measures the shaking</a:t>
             </a:r>
             <a:endParaRPr lang="en-US" sz="1800" dirty="0"/>
           </a:p>
@@ -12315,7 +12315,7 @@
                 <a:ea typeface="Calibri" pitchFamily="34" charset="-122"/>
                 <a:cs typeface="Calibri" pitchFamily="34" charset="-120"/>
               </a:rPr>
-              <a:t>The instrument that measures the shaking</a:t>
+              <a:t>The point deep underground where the earthquake starts</a:t>
             </a:r>
             <a:endParaRPr lang="en-US" sz="1800" dirty="0"/>
           </a:p>
@@ -12352,7 +12352,7 @@
                 <a:ea typeface="Calibri" pitchFamily="34" charset="-122"/>
                 <a:cs typeface="Calibri" pitchFamily="34" charset="-120"/>
               </a:rPr>
-              <a:t>A smaller earthquake after the main one</a:t>
+              <a:t>The point on the surface directly above where it starts</a:t>
             </a:r>
             <a:endParaRPr lang="en-US" sz="1800" dirty="0"/>
           </a:p>
@@ -12754,7 +12754,7 @@
                 <a:ea typeface="Calibri" pitchFamily="34" charset="-122"/>
                 <a:cs typeface="Calibri" pitchFamily="34" charset="-120"/>
               </a:rPr>
-              <a:t>An earthquake under the sea</a:t>
+              <a:t>Heavy rain over the ocean</a:t>
             </a:r>
             <a:endParaRPr lang="en-US" sz="2200" dirty="0"/>
           </a:p>
@@ -12791,7 +12791,7 @@
                 <a:ea typeface="Calibri" pitchFamily="34" charset="-122"/>
                 <a:cs typeface="Calibri" pitchFamily="34" charset="-120"/>
               </a:rPr>
-              <a:t>Heavy rain over the ocean</a:t>
+              <a:t>An earthquake under the sea</a:t>
             </a:r>
             <a:endParaRPr lang="en-US" sz="2200" dirty="0"/>
           </a:p>
@@ -12828,7 +12828,7 @@
                 <a:ea typeface="Calibri" pitchFamily="34" charset="-122"/>
                 <a:cs typeface="Calibri" pitchFamily="34" charset="-120"/>
               </a:rPr>
-              <a:t>A volcano erupting on land</a:t>
+              <a:t>Strong winds blowing across the sea</a:t>
             </a:r>
             <a:endParaRPr lang="en-US" sz="2200" dirty="0"/>
           </a:p>
@@ -12865,7 +12865,7 @@
                 <a:ea typeface="Calibri" pitchFamily="34" charset="-122"/>
                 <a:cs typeface="Calibri" pitchFamily="34" charset="-120"/>
               </a:rPr>
-              <a:t>Strong winds blowing across the sea</a:t>
+              <a:t>A volcano erupting on land</a:t>
             </a:r>
             <a:endParaRPr lang="en-US" sz="2200" dirty="0"/>
           </a:p>
@@ -13204,7 +13204,7 @@
                 <a:ea typeface="Cambria" pitchFamily="34" charset="-122"/>
                 <a:cs typeface="Cambria" pitchFamily="34" charset="-120"/>
               </a:rPr>
-              <a:t>A   The epicentre, directly above the focus</a:t>
+              <a:t>B   The epicentre, directly above the focus</a:t>
             </a:r>
             <a:endParaRPr lang="en-US" sz="1800" dirty="0"/>
           </a:p>
@@ -13725,7 +13725,7 @@
                 <a:ea typeface="Calibri" pitchFamily="34" charset="-122"/>
                 <a:cs typeface="Calibri" pitchFamily="34" charset="-120"/>
               </a:rPr>
-              <a:t>A   The point deep underground where the earthquake starts</a:t>
+              <a:t>C   The point deep underground where the earthquake starts</a:t>
             </a:r>
             <a:endParaRPr lang="en-US" sz="2200" dirty="0"/>
           </a:p>
@@ -14225,7 +14225,7 @@
                 <a:ea typeface="Calibri" pitchFamily="34" charset="-122"/>
                 <a:cs typeface="Calibri" pitchFamily="34" charset="-120"/>
               </a:rPr>
-              <a:t>A   An earthquake under the sea</a:t>
+              <a:t>B   An earthquake under the sea</a:t>
             </a:r>
             <a:endParaRPr lang="en-US" sz="2200" dirty="0"/>
           </a:p>

--- a/decks/geog-tectonics/geog-tectonics_ch4_earthquakes.pptx
+++ b/decks/geog-tectonics/geog-tectonics_ch4_earthquakes.pptx
@@ -126,30 +126,30 @@
   <p:extLst>
     <p:ext uri="{521415D9-36F7-43E2-AB2F-B90AF26B5E84}">
       <p14:sectionLst xmlns:p14="http://schemas.microsoft.com/office/powerpoint/2010/main">
-        <p14:section name="Opening" id="{d5811fe8-1980-af68-9933-d90351c5a7ed}">
+        <p14:section name="Opening" id="{0a50c639-9730-507b-8eb0-4e8523c6b650}">
           <p14:sldIdLst>
             <p14:sldId id="256"/>
           </p14:sldIdLst>
         </p14:section>
-        <p14:section name="Gate" id="{c9f2c05d-359d-c66d-800e-424ddd634f99}">
+        <p14:section name="Gate" id="{2dcaea6c-25e5-6208-cb60-8624b972e95c}">
           <p14:sldIdLst>
             <p14:sldId id="257"/>
             <p14:sldId id="258"/>
           </p14:sldIdLst>
         </p14:section>
-        <p14:section name="Pre-teach" id="{d5719e41-92fe-b575-8ce2-68392e5f1b53}">
+        <p14:section name="Pre-teach" id="{40793ff9-b9c7-273e-fe8d-d954beb510d6}">
           <p14:sldIdLst>
             <p14:sldId id="259"/>
             <p14:sldId id="260"/>
           </p14:sldIdLst>
         </p14:section>
-        <p14:section name="Read-along" id="{0508b681-792c-ff5f-4ace-f743a4eabe44}">
+        <p14:section name="Read-along" id="{bf055ab9-d190-ba70-61a9-4d3781454f4d}">
           <p14:sldIdLst>
             <p14:sldId id="261"/>
             <p14:sldId id="262"/>
           </p14:sldIdLst>
         </p14:section>
-        <p14:section name="Teach" id="{aec688c0-7ffe-01a2-67db-5a2494153649}">
+        <p14:section name="Teach" id="{f1ab6b66-accb-23f3-b947-79d8ed98636b}">
           <p14:sldIdLst>
             <p14:sldId id="263"/>
             <p14:sldId id="264"/>
@@ -158,7 +158,7 @@
             <p14:sldId id="267"/>
           </p14:sldIdLst>
         </p14:section>
-        <p14:section name="Routes" id="{6c86ef10-8b99-910b-4f2f-99b3d099eeb0}">
+        <p14:section name="Routes" id="{9ce40c94-65fd-cc05-2573-a03d9b689f28}">
           <p14:sldIdLst>
             <p14:sldId id="268"/>
             <p14:sldId id="269"/>
@@ -166,12 +166,12 @@
             <p14:sldId id="271"/>
           </p14:sldIdLst>
         </p14:section>
-        <p14:section name="Close" id="{492d76dd-24db-2d52-56e6-4a993b29ce81}">
+        <p14:section name="Close" id="{dc7b2f7c-3f50-e4dd-0a5f-d5bc1f2fa125}">
           <p14:sldIdLst>
             <p14:sldId id="272"/>
           </p14:sldIdLst>
         </p14:section>
-        <p14:section name="Answers" id="{caea86ff-d985-3a0b-9241-d057b02c0579}">
+        <p14:section name="Answers" id="{b33340fd-8476-75c4-286c-9af7a0c4e6cb}">
           <p14:sldIdLst>
             <p14:sldId id="273"/>
             <p14:sldId id="274"/>
